--- a/docs/meeting/2026_03_25.pptx
+++ b/docs/meeting/2026_03_25.pptx
@@ -1185,10 +1185,10 @@
       <dgm:prSet presAssocID="{920BF6AF-D097-451B-B004-3E4F0E0AEEB9}" presName="iconRect" presStyleLbl="node1" presStyleIdx="0" presStyleCnt="3"/>
       <dgm:spPr>
         <a:blipFill>
-          <a:blip xmlns:r="http://schemas.openxmlformats.org/officeDocument/2006/relationships" r:embed="rId1">
+          <a:blip xmlns:r="http://schemas.openxmlformats.org/officeDocument/2006/relationships">
             <a:extLst>
               <a:ext uri="{96DAC541-7B7A-43D3-8B79-37D633B846F1}">
-                <asvg:svgBlip xmlns:asvg="http://schemas.microsoft.com/office/drawing/2016/SVG/main" r:embed="rId2"/>
+                <asvg:svgBlip xmlns:asvg="http://schemas.microsoft.com/office/drawing/2016/SVG/main" r:embed="rId1"/>
               </a:ext>
             </a:extLst>
           </a:blip>
@@ -1236,10 +1236,10 @@
       <dgm:prSet presAssocID="{E39D2ACD-8A0D-4B01-833E-8042ACD0DB54}" presName="iconRect" presStyleLbl="node1" presStyleIdx="1" presStyleCnt="3"/>
       <dgm:spPr>
         <a:blipFill>
-          <a:blip xmlns:r="http://schemas.openxmlformats.org/officeDocument/2006/relationships" r:embed="rId3">
+          <a:blip xmlns:r="http://schemas.openxmlformats.org/officeDocument/2006/relationships">
             <a:extLst>
               <a:ext uri="{96DAC541-7B7A-43D3-8B79-37D633B846F1}">
-                <asvg:svgBlip xmlns:asvg="http://schemas.microsoft.com/office/drawing/2016/SVG/main" r:embed="rId4"/>
+                <asvg:svgBlip xmlns:asvg="http://schemas.microsoft.com/office/drawing/2016/SVG/main" r:embed="rId2"/>
               </a:ext>
             </a:extLst>
           </a:blip>
@@ -1287,10 +1287,10 @@
       <dgm:prSet presAssocID="{2A8A38E9-53CA-44D5-8DFC-907932863099}" presName="iconRect" presStyleLbl="node1" presStyleIdx="2" presStyleCnt="3"/>
       <dgm:spPr>
         <a:blipFill>
-          <a:blip xmlns:r="http://schemas.openxmlformats.org/officeDocument/2006/relationships" r:embed="rId5">
+          <a:blip xmlns:r="http://schemas.openxmlformats.org/officeDocument/2006/relationships">
             <a:extLst>
               <a:ext uri="{96DAC541-7B7A-43D3-8B79-37D633B846F1}">
-                <asvg:svgBlip xmlns:asvg="http://schemas.microsoft.com/office/drawing/2016/SVG/main" r:embed="rId6"/>
+                <asvg:svgBlip xmlns:asvg="http://schemas.microsoft.com/office/drawing/2016/SVG/main" r:embed="rId3"/>
               </a:ext>
             </a:extLst>
           </a:blip>
@@ -1423,10 +1423,10 @@
           <a:avLst/>
         </a:prstGeom>
         <a:blipFill>
-          <a:blip xmlns:r="http://schemas.openxmlformats.org/officeDocument/2006/relationships" r:embed="rId1">
+          <a:blip xmlns:r="http://schemas.openxmlformats.org/officeDocument/2006/relationships">
             <a:extLst>
               <a:ext uri="{96DAC541-7B7A-43D3-8B79-37D633B846F1}">
-                <asvg:svgBlip xmlns:asvg="http://schemas.microsoft.com/office/drawing/2016/SVG/main" r:embed="rId2"/>
+                <asvg:svgBlip xmlns:asvg="http://schemas.microsoft.com/office/drawing/2016/SVG/main" r:embed="rId1"/>
               </a:ext>
             </a:extLst>
           </a:blip>
@@ -1616,10 +1616,10 @@
           <a:avLst/>
         </a:prstGeom>
         <a:blipFill>
-          <a:blip xmlns:r="http://schemas.openxmlformats.org/officeDocument/2006/relationships" r:embed="rId3">
+          <a:blip xmlns:r="http://schemas.openxmlformats.org/officeDocument/2006/relationships">
             <a:extLst>
               <a:ext uri="{96DAC541-7B7A-43D3-8B79-37D633B846F1}">
-                <asvg:svgBlip xmlns:asvg="http://schemas.microsoft.com/office/drawing/2016/SVG/main" r:embed="rId4"/>
+                <asvg:svgBlip xmlns:asvg="http://schemas.microsoft.com/office/drawing/2016/SVG/main" r:embed="rId2"/>
               </a:ext>
             </a:extLst>
           </a:blip>
@@ -1823,10 +1823,10 @@
           <a:avLst/>
         </a:prstGeom>
         <a:blipFill>
-          <a:blip xmlns:r="http://schemas.openxmlformats.org/officeDocument/2006/relationships" r:embed="rId5">
+          <a:blip xmlns:r="http://schemas.openxmlformats.org/officeDocument/2006/relationships">
             <a:extLst>
               <a:ext uri="{96DAC541-7B7A-43D3-8B79-37D633B846F1}">
-                <asvg:svgBlip xmlns:asvg="http://schemas.microsoft.com/office/drawing/2016/SVG/main" r:embed="rId6"/>
+                <asvg:svgBlip xmlns:asvg="http://schemas.microsoft.com/office/drawing/2016/SVG/main" r:embed="rId3"/>
               </a:ext>
             </a:extLst>
           </a:blip>
@@ -3374,7 +3374,7 @@
           <a:p>
             <a:fld id="{2915196C-CDBC-4DEE-A220-849C85FC22AC}" type="datetimeFigureOut">
               <a:rPr lang="he-IL" smtClean="0"/>
-              <a:t>ז'/ניסן/תשפ"ו</a:t>
+              <a:t>י"א/ניסן/תשפ"ו</a:t>
             </a:fld>
             <a:endParaRPr lang="he-IL"/>
           </a:p>
@@ -4058,7 +4058,7 @@
           <a:p>
             <a:fld id="{FC6B3A86-AB79-4388-8CA5-9FC4B834779B}" type="datetime8">
               <a:rPr lang="he-IL" smtClean="0"/>
-              <a:t>25 מרץ 26</a:t>
+              <a:t>29 מרץ 26</a:t>
             </a:fld>
             <a:endParaRPr lang="he-IL"/>
           </a:p>
@@ -4281,7 +4281,7 @@
           <a:p>
             <a:fld id="{18F56BC8-8E7D-4896-9980-77BC87FB8E3E}" type="datetime8">
               <a:rPr lang="he-IL" smtClean="0"/>
-              <a:t>25 מרץ 26</a:t>
+              <a:t>29 מרץ 26</a:t>
             </a:fld>
             <a:endParaRPr lang="he-IL"/>
           </a:p>
@@ -4514,7 +4514,7 @@
           <a:p>
             <a:fld id="{0FE327C8-CB36-417E-834B-544633ADCE63}" type="datetime8">
               <a:rPr lang="he-IL" smtClean="0"/>
-              <a:t>25 מרץ 26</a:t>
+              <a:t>29 מרץ 26</a:t>
             </a:fld>
             <a:endParaRPr lang="he-IL"/>
           </a:p>
@@ -4632,7 +4632,7 @@
           <a:p>
             <a:fld id="{8E065D1C-C98B-44F5-AB2A-FEE3E85D0A94}" type="datetime8">
               <a:rPr lang="he-IL" smtClean="0"/>
-              <a:t>25 מרץ 26</a:t>
+              <a:t>29 מרץ 26</a:t>
             </a:fld>
             <a:endParaRPr lang="he-IL"/>
           </a:p>
@@ -4943,7 +4943,7 @@
           <a:p>
             <a:fld id="{7634CBFB-2532-48BA-BAE2-ADD925390740}" type="datetime8">
               <a:rPr lang="he-IL" smtClean="0"/>
-              <a:t>25 מרץ 26</a:t>
+              <a:t>29 מרץ 26</a:t>
             </a:fld>
             <a:endParaRPr lang="he-IL"/>
           </a:p>
@@ -5226,7 +5226,7 @@
           <a:p>
             <a:fld id="{8EAC1FDD-37C4-4A6B-BF31-779943CE32CF}" type="datetime8">
               <a:rPr lang="he-IL" smtClean="0"/>
-              <a:t>25 מרץ 26</a:t>
+              <a:t>29 מרץ 26</a:t>
             </a:fld>
             <a:endParaRPr lang="he-IL"/>
           </a:p>
@@ -5539,7 +5539,7 @@
           <a:p>
             <a:fld id="{C73C226C-A76A-4927-8F1D-1BD4AC033ABB}" type="datetime8">
               <a:rPr lang="he-IL" smtClean="0"/>
-              <a:t>25 מרץ 26</a:t>
+              <a:t>29 מרץ 26</a:t>
             </a:fld>
             <a:endParaRPr lang="he-IL"/>
           </a:p>
@@ -6042,7 +6042,7 @@
           <a:p>
             <a:fld id="{430DF2BF-D428-43E9-B36B-6DD16CF93579}" type="datetime8">
               <a:rPr lang="he-IL" smtClean="0"/>
-              <a:t>25 מרץ 26</a:t>
+              <a:t>29 מרץ 26</a:t>
             </a:fld>
             <a:endParaRPr lang="he-IL"/>
           </a:p>
@@ -6189,7 +6189,7 @@
           <a:p>
             <a:fld id="{390A9136-4922-4C74-B05C-12CD0951E601}" type="datetime8">
               <a:rPr lang="he-IL" smtClean="0"/>
-              <a:t>25 מרץ 26</a:t>
+              <a:t>29 מרץ 26</a:t>
             </a:fld>
             <a:endParaRPr lang="he-IL"/>
           </a:p>
@@ -6307,7 +6307,7 @@
           <a:p>
             <a:fld id="{C29F3CA8-2E63-412C-AA06-0D760EBE5965}" type="datetime8">
               <a:rPr lang="he-IL" smtClean="0"/>
-              <a:t>25 מרץ 26</a:t>
+              <a:t>29 מרץ 26</a:t>
             </a:fld>
             <a:endParaRPr lang="he-IL"/>
           </a:p>
@@ -6629,7 +6629,7 @@
           <a:p>
             <a:fld id="{7AC7B867-AA4A-4FF3-AD8B-0AD0F18EE595}" type="datetime8">
               <a:rPr lang="he-IL" smtClean="0"/>
-              <a:t>25 מרץ 26</a:t>
+              <a:t>29 מרץ 26</a:t>
             </a:fld>
             <a:endParaRPr lang="he-IL"/>
           </a:p>
@@ -6927,7 +6927,7 @@
           <a:p>
             <a:fld id="{F5E9EBD3-88E8-46DB-BD3B-F935B7013014}" type="datetime8">
               <a:rPr lang="he-IL" smtClean="0"/>
-              <a:t>25 מרץ 26</a:t>
+              <a:t>29 מרץ 26</a:t>
             </a:fld>
             <a:endParaRPr lang="he-IL"/>
           </a:p>
@@ -7211,7 +7211,7 @@
           <a:p>
             <a:fld id="{8E065D1C-C98B-44F5-AB2A-FEE3E85D0A94}" type="datetime8">
               <a:rPr lang="he-IL" smtClean="0"/>
-              <a:t>25 מרץ 26</a:t>
+              <a:t>29 מרץ 26</a:t>
             </a:fld>
             <a:endParaRPr lang="he-IL"/>
           </a:p>
